--- a/lecture_pptx/out/s17/ワーク02.pptx
+++ b/lecture_pptx/out/s17/ワーク02.pptx
@@ -2279,7 +2279,7 @@
         <p:spPr>
           <a:xfrm>
             <a:off x="365760" y="1188720"/>
-            <a:ext cx="1979676" cy="2468880"/>
+            <a:ext cx="1979676" cy="3017520"/>
           </a:xfrm>
           <a:prstGeom prst="roundRect">
             <a:avLst>
@@ -2386,8 +2386,8 @@
         </p:nvSpPr>
         <p:spPr>
           <a:xfrm>
-            <a:off x="530352" y="1901952"/>
-            <a:ext cx="1650492" cy="1645920"/>
+            <a:off x="530352" y="1938528"/>
+            <a:ext cx="1650492" cy="2148840"/>
           </a:xfrm>
           <a:prstGeom prst="rect">
             <a:avLst/>
@@ -2401,12 +2401,12 @@
           <a:p>
             <a:pPr indent="0" marL="0">
               <a:spcAft>
-                <a:spcPts val="200"/>
+                <a:spcPts val="600"/>
               </a:spcAft>
               <a:buNone/>
             </a:pPr>
             <a:r>
-              <a:rPr lang="en-US" sz="1300" dirty="0">
+              <a:rPr lang="en-US" sz="1600" dirty="0">
                 <a:solidFill>
                   <a:srgbClr val="1A1A1A"/>
                 </a:solidFill>
@@ -2416,7 +2416,7 @@
               </a:rPr>
               <a:t>回答を集めるWebフォームを無料で作れるサービス。</a:t>
             </a:r>
-            <a:endParaRPr lang="en-US" sz="1300" dirty="0"/>
+            <a:endParaRPr lang="en-US" sz="1600" dirty="0"/>
           </a:p>
         </p:txBody>
       </p:sp>
@@ -2429,7 +2429,7 @@
         <p:spPr>
           <a:xfrm>
             <a:off x="2510028" y="1188720"/>
-            <a:ext cx="1979676" cy="2468880"/>
+            <a:ext cx="1979676" cy="3017520"/>
           </a:xfrm>
           <a:prstGeom prst="roundRect">
             <a:avLst>
@@ -2536,8 +2536,8 @@
         </p:nvSpPr>
         <p:spPr>
           <a:xfrm>
-            <a:off x="2674620" y="1901952"/>
-            <a:ext cx="1650492" cy="1645920"/>
+            <a:off x="2674620" y="1938528"/>
+            <a:ext cx="1650492" cy="2148840"/>
           </a:xfrm>
           <a:prstGeom prst="rect">
             <a:avLst/>
@@ -2551,12 +2551,12 @@
           <a:p>
             <a:pPr indent="0" marL="0">
               <a:spcAft>
-                <a:spcPts val="200"/>
+                <a:spcPts val="600"/>
               </a:spcAft>
               <a:buNone/>
             </a:pPr>
             <a:r>
-              <a:rPr lang="en-US" sz="1300" dirty="0">
+              <a:rPr lang="en-US" sz="1600" dirty="0">
                 <a:solidFill>
                   <a:srgbClr val="1A1A1A"/>
                 </a:solidFill>
@@ -2566,7 +2566,7 @@
               </a:rPr>
               <a:t>フォーム回答時に自動でGASを実行するトリガー。</a:t>
             </a:r>
-            <a:endParaRPr lang="en-US" sz="1300" dirty="0"/>
+            <a:endParaRPr lang="en-US" sz="1600" dirty="0"/>
           </a:p>
         </p:txBody>
       </p:sp>
@@ -2579,7 +2579,7 @@
         <p:spPr>
           <a:xfrm>
             <a:off x="4654296" y="1188720"/>
-            <a:ext cx="1979676" cy="2468880"/>
+            <a:ext cx="1979676" cy="3017520"/>
           </a:xfrm>
           <a:prstGeom prst="roundRect">
             <a:avLst>
@@ -2686,8 +2686,8 @@
         </p:nvSpPr>
         <p:spPr>
           <a:xfrm>
-            <a:off x="4818888" y="1901952"/>
-            <a:ext cx="1650492" cy="1645920"/>
+            <a:off x="4818888" y="1938528"/>
+            <a:ext cx="1650492" cy="2148840"/>
           </a:xfrm>
           <a:prstGeom prst="rect">
             <a:avLst/>
@@ -2701,12 +2701,12 @@
           <a:p>
             <a:pPr indent="0" marL="0">
               <a:spcAft>
-                <a:spcPts val="200"/>
+                <a:spcPts val="600"/>
               </a:spcAft>
               <a:buNone/>
             </a:pPr>
             <a:r>
-              <a:rPr lang="en-US" sz="1300" dirty="0">
+              <a:rPr lang="en-US" sz="1600" dirty="0">
                 <a:solidFill>
                   <a:srgbClr val="1A1A1A"/>
                 </a:solidFill>
@@ -2716,7 +2716,7 @@
               </a:rPr>
               <a:t>顧客の基本情報を一元管理するスプシ。</a:t>
             </a:r>
-            <a:endParaRPr lang="en-US" sz="1300" dirty="0"/>
+            <a:endParaRPr lang="en-US" sz="1600" dirty="0"/>
           </a:p>
         </p:txBody>
       </p:sp>
@@ -2729,7 +2729,7 @@
         <p:spPr>
           <a:xfrm>
             <a:off x="6798564" y="1188720"/>
-            <a:ext cx="1979676" cy="2468880"/>
+            <a:ext cx="1979676" cy="3017520"/>
           </a:xfrm>
           <a:prstGeom prst="roundRect">
             <a:avLst>
@@ -2836,8 +2836,8 @@
         </p:nvSpPr>
         <p:spPr>
           <a:xfrm>
-            <a:off x="6963156" y="1901952"/>
-            <a:ext cx="1650492" cy="1645920"/>
+            <a:off x="6963156" y="1938528"/>
+            <a:ext cx="1650492" cy="2148840"/>
           </a:xfrm>
           <a:prstGeom prst="rect">
             <a:avLst/>
@@ -2851,12 +2851,12 @@
           <a:p>
             <a:pPr indent="0" marL="0">
               <a:spcAft>
-                <a:spcPts val="200"/>
+                <a:spcPts val="600"/>
               </a:spcAft>
               <a:buNone/>
             </a:pPr>
             <a:r>
-              <a:rPr lang="en-US" sz="1300" dirty="0">
+              <a:rPr lang="en-US" sz="1600" dirty="0">
                 <a:solidFill>
                   <a:srgbClr val="1A1A1A"/>
                 </a:solidFill>
@@ -2864,9 +2864,26 @@
                 <a:ea typeface="Yu Gothic UI" pitchFamily="34" charset="-122"/>
                 <a:cs typeface="Yu Gothic UI" pitchFamily="34" charset="-120"/>
               </a:rPr>
-              <a:t>対面ヒアリングで使う紙のメモ。聞き忘れ防止。</a:t>
-            </a:r>
-            <a:endParaRPr lang="en-US" sz="1300" dirty="0"/>
+              <a:t>対面ヒアリングで使う紙のメモ。</a:t>
+            </a:r>
+            <a:pPr indent="0" marL="0">
+              <a:spcAft>
+                <a:spcPts val="600"/>
+              </a:spcAft>
+              <a:buNone/>
+            </a:pPr>
+            <a:r>
+              <a:rPr lang="en-US" sz="1600" dirty="0">
+                <a:solidFill>
+                  <a:srgbClr val="1A1A1A"/>
+                </a:solidFill>
+                <a:latin typeface="Yu Gothic UI" pitchFamily="34" charset="0"/>
+                <a:ea typeface="Yu Gothic UI" pitchFamily="34" charset="-122"/>
+                <a:cs typeface="Yu Gothic UI" pitchFamily="34" charset="-120"/>
+              </a:rPr>
+              <a:t>聞き忘れ防止。</a:t>
+            </a:r>
+            <a:endParaRPr lang="en-US" sz="1600" dirty="0"/>
           </a:p>
         </p:txBody>
       </p:sp>
@@ -2878,8 +2895,8 @@
         </p:nvSpPr>
         <p:spPr>
           <a:xfrm>
-            <a:off x="365760" y="3931920"/>
-            <a:ext cx="8412480" cy="1188720"/>
+            <a:off x="365760" y="4389120"/>
+            <a:ext cx="8412480" cy="914400"/>
           </a:xfrm>
           <a:prstGeom prst="rect">
             <a:avLst/>

--- a/lecture_pptx/out/s17/ワーク02.pptx
+++ b/lecture_pptx/out/s17/ワーク02.pptx
@@ -1551,7 +1551,7 @@
                 <a:ea typeface="Yu Gothic UI Semibold" pitchFamily="34" charset="-122"/>
                 <a:cs typeface="Yu Gothic UI Semibold" pitchFamily="34" charset="-120"/>
               </a:rPr>
-              <a:t>ヒアリングのフォーム化</a:t>
+              <a:t>GAS + Gemini で ライフプランAI を実装</a:t>
             </a:r>
             <a:endParaRPr lang="en-US" sz="3800" dirty="0"/>
           </a:p>
@@ -1590,7 +1590,7 @@
                 <a:ea typeface="Yu Gothic UI" pitchFamily="34" charset="-122"/>
                 <a:cs typeface="Yu Gothic UI" pitchFamily="34" charset="-120"/>
               </a:rPr>
-              <a:t>商談前にAIヒアリングを完了させ、商談は提案に集中</a:t>
+              <a:t>顧客カルテを埋めて "実行" ボタン → 30秒で40年CF+保険提案フックが出るツールをバイブコーディング</a:t>
             </a:r>
             <a:endParaRPr lang="en-US" sz="1900" dirty="0"/>
           </a:p>
@@ -1806,7 +1806,7 @@
                 <a:ea typeface="Yu Gothic UI Semibold" pitchFamily="34" charset="-122"/>
                 <a:cs typeface="Yu Gothic UI Semibold" pitchFamily="34" charset="-120"/>
               </a:rPr>
-              <a:t>Google フォーム化</a:t>
+              <a:t>GAS + Gemini バイブコーディング</a:t>
             </a:r>
             <a:endParaRPr lang="en-US" sz="1700" dirty="0"/>
           </a:p>
@@ -1845,7 +1845,7 @@
                 <a:ea typeface="Yu Gothic UI" pitchFamily="34" charset="-122"/>
                 <a:cs typeface="Yu Gothic UI" pitchFamily="34" charset="-120"/>
               </a:rPr>
-              <a:t>30項目を 20問のフォームに編成。</a:t>
+              <a:t>W01の入出力設計を Code_ライフプランAI.gs に落とし込む</a:t>
             </a:r>
             <a:endParaRPr lang="en-US" sz="1300" dirty="0"/>
           </a:p>
@@ -1970,7 +1970,7 @@
                 <a:ea typeface="Yu Gothic UI Semibold" pitchFamily="34" charset="-122"/>
                 <a:cs typeface="Yu Gothic UI Semibold" pitchFamily="34" charset="-120"/>
               </a:rPr>
-              <a:t>回答→スプシ整理 GAS</a:t>
+              <a:t>スプシに自動書き出し + グラフ</a:t>
             </a:r>
             <a:endParaRPr lang="en-US" sz="1700" dirty="0"/>
           </a:p>
@@ -2009,7 +2009,7 @@
                 <a:ea typeface="Yu Gothic UI" pitchFamily="34" charset="-122"/>
                 <a:cs typeface="Yu Gothic UI" pitchFamily="34" charset="-120"/>
               </a:rPr>
-              <a:t>顧客情報シートに自動整理。</a:t>
+              <a:t>CF表を書き出し、貯蓄残高の折れ線グラフを自動生成</a:t>
             </a:r>
             <a:endParaRPr lang="en-US" sz="1300" dirty="0"/>
           </a:p>
@@ -2134,7 +2134,7 @@
                 <a:ea typeface="Yu Gothic UI Semibold" pitchFamily="34" charset="-122"/>
                 <a:cs typeface="Yu Gothic UI Semibold" pitchFamily="34" charset="-120"/>
               </a:rPr>
-              <a:t>基礎組はチェックリスト</a:t>
+              <a:t>3ケースで実測+運用ルール</a:t>
             </a:r>
             <a:endParaRPr lang="en-US" sz="1700" dirty="0"/>
           </a:p>
@@ -2173,7 +2173,7 @@
                 <a:ea typeface="Yu Gothic UI" pitchFamily="34" charset="-122"/>
                 <a:cs typeface="Yu Gothic UI" pitchFamily="34" charset="-120"/>
               </a:rPr>
-              <a:t>対面で漏れなく聞けるカード作成。</a:t>
+              <a:t>記入例・前提変更・破綻シナリオ の3ケースで動作確認、運用ルール決定</a:t>
             </a:r>
             <a:endParaRPr lang="en-US" sz="1300" dirty="0"/>
           </a:p>
@@ -2372,7 +2372,7 @@
                 <a:ea typeface="Yu Gothic UI Semibold" pitchFamily="34" charset="-122"/>
                 <a:cs typeface="Yu Gothic UI Semibold" pitchFamily="34" charset="-120"/>
               </a:rPr>
-              <a:t>Google フォーム</a:t>
+              <a:t>GAS(Google Apps Script)</a:t>
             </a:r>
             <a:endParaRPr lang="en-US" sz="1600" dirty="0"/>
           </a:p>
@@ -2414,7 +2414,7 @@
                 <a:ea typeface="Yu Gothic UI" pitchFamily="34" charset="-122"/>
                 <a:cs typeface="Yu Gothic UI" pitchFamily="34" charset="-120"/>
               </a:rPr>
-              <a:t>回答を集めるWebフォームを無料で作れるサービス。</a:t>
+              <a:t>Googleスプシに Javascript で機能追加できる無料の実行環境。</a:t>
             </a:r>
             <a:endParaRPr lang="en-US" sz="1600" dirty="0"/>
           </a:p>
@@ -2522,7 +2522,7 @@
                 <a:ea typeface="Yu Gothic UI Semibold" pitchFamily="34" charset="-122"/>
                 <a:cs typeface="Yu Gothic UI Semibold" pitchFamily="34" charset="-120"/>
               </a:rPr>
-              <a:t>onFormSubmit</a:t>
+              <a:t>responseSchema</a:t>
             </a:r>
             <a:endParaRPr lang="en-US" sz="1600" dirty="0"/>
           </a:p>
@@ -2564,7 +2564,7 @@
                 <a:ea typeface="Yu Gothic UI" pitchFamily="34" charset="-122"/>
                 <a:cs typeface="Yu Gothic UI" pitchFamily="34" charset="-120"/>
               </a:rPr>
-              <a:t>フォーム回答時に自動でGASを実行するトリガー。</a:t>
+              <a:t>Gemini API に "この JSON 構造で返して" と厳密指定する仕組み。</a:t>
             </a:r>
             <a:endParaRPr lang="en-US" sz="1600" dirty="0"/>
           </a:p>
@@ -2672,7 +2672,7 @@
                 <a:ea typeface="Yu Gothic UI Semibold" pitchFamily="34" charset="-122"/>
                 <a:cs typeface="Yu Gothic UI Semibold" pitchFamily="34" charset="-120"/>
               </a:rPr>
-              <a:t>顧客情報シート</a:t>
+              <a:t>条件付き書式</a:t>
             </a:r>
             <a:endParaRPr lang="en-US" sz="1600" dirty="0"/>
           </a:p>
@@ -2714,7 +2714,24 @@
                 <a:ea typeface="Yu Gothic UI" pitchFamily="34" charset="-122"/>
                 <a:cs typeface="Yu Gothic UI" pitchFamily="34" charset="-120"/>
               </a:rPr>
-              <a:t>顧客の基本情報を一元管理するスプシ。</a:t>
+              <a:t>セルの値に応じて色を自動でつける機能。</a:t>
+            </a:r>
+            <a:pPr indent="0" marL="0">
+              <a:spcAft>
+                <a:spcPts val="600"/>
+              </a:spcAft>
+              <a:buNone/>
+            </a:pPr>
+            <a:r>
+              <a:rPr lang="en-US" sz="1600" dirty="0">
+                <a:solidFill>
+                  <a:srgbClr val="1A1A1A"/>
+                </a:solidFill>
+                <a:latin typeface="Yu Gothic UI" pitchFamily="34" charset="0"/>
+                <a:ea typeface="Yu Gothic UI" pitchFamily="34" charset="-122"/>
+                <a:cs typeface="Yu Gothic UI" pitchFamily="34" charset="-120"/>
+              </a:rPr>
+              <a:t>GAS からも設定できる。</a:t>
             </a:r>
             <a:endParaRPr lang="en-US" sz="1600" dirty="0"/>
           </a:p>
@@ -2822,7 +2839,7 @@
                 <a:ea typeface="Yu Gothic UI Semibold" pitchFamily="34" charset="-122"/>
                 <a:cs typeface="Yu Gothic UI Semibold" pitchFamily="34" charset="-120"/>
               </a:rPr>
-              <a:t>チェックリスト</a:t>
+              <a:t>サイドバー</a:t>
             </a:r>
             <a:endParaRPr lang="en-US" sz="1600" dirty="0"/>
           </a:p>
@@ -2864,7 +2881,7 @@
                 <a:ea typeface="Yu Gothic UI" pitchFamily="34" charset="-122"/>
                 <a:cs typeface="Yu Gothic UI" pitchFamily="34" charset="-120"/>
               </a:rPr>
-              <a:t>対面ヒアリングで使う紙のメモ。</a:t>
+              <a:t>スプシ右側に開ける HTML UI。</a:t>
             </a:r>
             <a:pPr indent="0" marL="0">
               <a:spcAft>
@@ -2881,7 +2898,7 @@
                 <a:ea typeface="Yu Gothic UI" pitchFamily="34" charset="-122"/>
                 <a:cs typeface="Yu Gothic UI" pitchFamily="34" charset="-120"/>
               </a:rPr>
-              <a:t>聞き忘れ防止。</a:t>
+              <a:t>実行状況や結果サマリの表示に使う。</a:t>
             </a:r>
             <a:endParaRPr lang="en-US" sz="1600" dirty="0"/>
           </a:p>
@@ -2934,7 +2951,7 @@
                 <a:ea typeface="Yu Gothic UI" pitchFamily="34" charset="-122"/>
                 <a:cs typeface="Yu Gothic UI" pitchFamily="34" charset="-120"/>
               </a:rPr>
-              <a:t>Google フォーム: </a:t>
+              <a:t>GAS(Google Apps Script): </a:t>
             </a:r>
             <a:pPr indent="0" marL="0">
               <a:buNone/>
@@ -2948,7 +2965,7 @@
                 <a:ea typeface="Yu Gothic UI" pitchFamily="34" charset="-122"/>
                 <a:cs typeface="Yu Gothic UI" pitchFamily="34" charset="-120"/>
               </a:rPr>
-              <a:t>スプシと自動連携   </a:t>
+              <a:t>メニュー追加・API呼出・シート書出   </a:t>
             </a:r>
             <a:pPr indent="0" marL="0">
               <a:buNone/>
@@ -2976,7 +2993,7 @@
                 <a:ea typeface="Yu Gothic UI" pitchFamily="34" charset="-122"/>
                 <a:cs typeface="Yu Gothic UI" pitchFamily="34" charset="-120"/>
               </a:rPr>
-              <a:t>onFormSubmit: </a:t>
+              <a:t>responseSchema: </a:t>
             </a:r>
             <a:pPr indent="0" marL="0">
               <a:buNone/>
@@ -2990,7 +3007,7 @@
                 <a:ea typeface="Yu Gothic UI" pitchFamily="34" charset="-122"/>
                 <a:cs typeface="Yu Gothic UI" pitchFamily="34" charset="-120"/>
               </a:rPr>
-              <a:t>回答即時処理が可能   </a:t>
+              <a:t>AI出力の暴走を防ぐ   </a:t>
             </a:r>
             <a:pPr indent="0" marL="0">
               <a:buNone/>
@@ -3018,7 +3035,7 @@
                 <a:ea typeface="Yu Gothic UI" pitchFamily="34" charset="-122"/>
                 <a:cs typeface="Yu Gothic UI" pitchFamily="34" charset="-120"/>
               </a:rPr>
-              <a:t>顧客情報シート: </a:t>
+              <a:t>条件付き書式: </a:t>
             </a:r>
             <a:pPr indent="0" marL="0">
               <a:buNone/>
@@ -3032,7 +3049,7 @@
                 <a:ea typeface="Yu Gothic UI" pitchFamily="34" charset="-122"/>
                 <a:cs typeface="Yu Gothic UI" pitchFamily="34" charset="-120"/>
               </a:rPr>
-              <a:t>提案資料の基礎データ   </a:t>
+              <a:t>収支マイナス=赤 等   </a:t>
             </a:r>
             <a:pPr indent="0" marL="0">
               <a:buNone/>
@@ -3060,7 +3077,7 @@
                 <a:ea typeface="Yu Gothic UI" pitchFamily="34" charset="-122"/>
                 <a:cs typeface="Yu Gothic UI" pitchFamily="34" charset="-120"/>
               </a:rPr>
-              <a:t>チェックリスト: </a:t>
+              <a:t>サイドバー: </a:t>
             </a:r>
             <a:pPr indent="0" marL="0">
               <a:buNone/>
@@ -3074,7 +3091,7 @@
                 <a:ea typeface="Yu Gothic UI" pitchFamily="34" charset="-122"/>
                 <a:cs typeface="Yu Gothic UI" pitchFamily="34" charset="-120"/>
               </a:rPr>
-              <a:t>A4 1枚が限界</a:t>
+              <a:t>HtmlService でオプション</a:t>
             </a:r>
             <a:endParaRPr lang="en-US" sz="1100" dirty="0"/>
           </a:p>
@@ -3165,7 +3182,7 @@
                 <a:ea typeface="Yu Gothic UI Semibold" pitchFamily="34" charset="-122"/>
                 <a:cs typeface="Yu Gothic UI Semibold" pitchFamily="34" charset="-120"/>
               </a:rPr>
-              <a:t>演習1 ヒアリングのフォーム化</a:t>
+              <a:t>演習1 GAS で 入力→Gemini→スプシ書出 を実装</a:t>
             </a:r>
             <a:endParaRPr lang="en-US" sz="2600" dirty="0"/>
           </a:p>
@@ -3293,7 +3310,27 @@
                 <a:ea typeface="Yu Gothic UI" pitchFamily="34" charset="-122"/>
                 <a:cs typeface="Yu Gothic UI" pitchFamily="34" charset="-120"/>
               </a:rPr>
-              <a:t>商談時間にヒアリングで大半を使い、提案時間が足りない。商談前にフォームで聞いておく。</a:t>
+              <a:t>W01 で決めた 顧客カルテ・前提テーブル・出力設計 を、AI ツールとして動く形に実装する。</a:t>
+            </a:r>
+            <a:endParaRPr lang="en-US" sz="1400" dirty="0"/>
+          </a:p>
+          <a:p>
+            <a:pPr indent="0" marL="0">
+              <a:spcAft>
+                <a:spcPts val="400"/>
+              </a:spcAft>
+              <a:buNone/>
+            </a:pPr>
+            <a:r>
+              <a:rPr lang="en-US" sz="1400" dirty="0">
+                <a:solidFill>
+                  <a:srgbClr val="1A1A1A"/>
+                </a:solidFill>
+                <a:latin typeface="Yu Gothic UI" pitchFamily="34" charset="0"/>
+                <a:ea typeface="Yu Gothic UI" pitchFamily="34" charset="-122"/>
+                <a:cs typeface="Yu Gothic UI" pitchFamily="34" charset="-120"/>
+              </a:rPr>
+              <a:t>同梱の Code_ライフプランAI.gs をベースに、生徒は 自分の代理店に合わせて微調整して動かす。</a:t>
             </a:r>
             <a:endParaRPr lang="en-US" sz="1400" dirty="0"/>
           </a:p>
@@ -3422,7 +3459,7 @@
                 <a:ea typeface="Yu Gothic UI" pitchFamily="34" charset="-122"/>
                 <a:cs typeface="Yu Gothic UI" pitchFamily="34" charset="-120"/>
               </a:rPr>
-              <a:t>Gemini に「30項目を20問のフォームに編成」依頼</a:t>
+              <a:t>講師デモで バイブコーディング の流れを見せる(Geminiに "この設計で GAS書いて" 依頼→貼付→調整)</a:t>
             </a:r>
             <a:endParaRPr lang="en-US" sz="1400" dirty="0"/>
           </a:p>
@@ -3443,7 +3480,7 @@
                 <a:ea typeface="Yu Gothic UI" pitchFamily="34" charset="-122"/>
                 <a:cs typeface="Yu Gothic UI" pitchFamily="34" charset="-120"/>
               </a:rPr>
-              <a:t>冒頭はあいさつと所要時間</a:t>
+              <a:t>API キーは必ず スクリプトプロパティに(コード直書き絶対NG)</a:t>
             </a:r>
             <a:endParaRPr lang="en-US" sz="1400" dirty="0"/>
           </a:p>
@@ -3464,7 +3501,7 @@
                 <a:ea typeface="Yu Gothic UI" pitchFamily="34" charset="-122"/>
                 <a:cs typeface="Yu Gothic UI" pitchFamily="34" charset="-120"/>
               </a:rPr>
-              <a:t>質問はセクション分け(2-3画面)</a:t>
+              <a:t>初回実行時の権限承認画面で「安全ではない...」に驚かない、自分のスクリプトだから許可でOK</a:t>
             </a:r>
             <a:endParaRPr lang="en-US" sz="1400" dirty="0"/>
           </a:p>
@@ -3485,7 +3522,7 @@
                 <a:ea typeface="Yu Gothic UI" pitchFamily="34" charset="-122"/>
                 <a:cs typeface="Yu Gothic UI" pitchFamily="34" charset="-120"/>
               </a:rPr>
-              <a:t>送信後のサンクスメッセージも</a:t>
+              <a:t>エラーが出たら Logger のログを見る(GASエディタ下部)</a:t>
             </a:r>
             <a:endParaRPr lang="en-US" sz="1400" dirty="0"/>
           </a:p>
@@ -3614,7 +3651,7 @@
                 <a:ea typeface="Yu Gothic UI" pitchFamily="34" charset="-122"/>
                 <a:cs typeface="Yu Gothic UI" pitchFamily="34" charset="-120"/>
               </a:rPr>
-              <a:t>30項目を20問に編成</a:t>
+              <a:t>GAS プロジェクトを開き、Code_ライフプランAI.gs と Sidebar.html を貼付</a:t>
             </a:r>
             <a:endParaRPr lang="en-US" sz="1400" dirty="0"/>
           </a:p>
@@ -3635,7 +3672,7 @@
                 <a:ea typeface="Yu Gothic UI" pitchFamily="34" charset="-122"/>
                 <a:cs typeface="Yu Gothic UI" pitchFamily="34" charset="-120"/>
               </a:rPr>
-              <a:t>Google フォーム作成</a:t>
+              <a:t>スクリプトプロパティに GEMINI_API_KEY を設定</a:t>
             </a:r>
             <a:endParaRPr lang="en-US" sz="1400" dirty="0"/>
           </a:p>
@@ -3656,7 +3693,7 @@
                 <a:ea typeface="Yu Gothic UI" pitchFamily="34" charset="-122"/>
                 <a:cs typeface="Yu Gothic UI" pitchFamily="34" charset="-120"/>
               </a:rPr>
-              <a:t>必須/任意を明確化</a:t>
+              <a:t>関数 testSetup を実行 → 権限承認 &amp; 動作確認</a:t>
             </a:r>
             <a:endParaRPr lang="en-US" sz="1400" dirty="0"/>
           </a:p>
@@ -3677,7 +3714,28 @@
                 <a:ea typeface="Yu Gothic UI" pitchFamily="34" charset="-122"/>
                 <a:cs typeface="Yu Gothic UI" pitchFamily="34" charset="-120"/>
               </a:rPr>
-              <a:t>自由記述は最小限</a:t>
+              <a:t>スプシメニュー「ライフプランAI」→「シミュレーション実行」で 記入例を実行</a:t>
+            </a:r>
+            <a:endParaRPr lang="en-US" sz="1400" dirty="0"/>
+          </a:p>
+          <a:p>
+            <a:pPr marL="342900" indent="-342900">
+              <a:spcAft>
+                <a:spcPts val="400"/>
+              </a:spcAft>
+              <a:buSzPct val="100000"/>
+              <a:buChar char="●"/>
+            </a:pPr>
+            <a:r>
+              <a:rPr lang="en-US" sz="1400" dirty="0">
+                <a:solidFill>
+                  <a:srgbClr val="1A1A1A"/>
+                </a:solidFill>
+                <a:latin typeface="Yu Gothic UI" pitchFamily="34" charset="0"/>
+                <a:ea typeface="Yu Gothic UI" pitchFamily="34" charset="-122"/>
+                <a:cs typeface="Yu Gothic UI" pitchFamily="34" charset="-120"/>
+              </a:rPr>
+              <a:t>「シミュレーション結果」シートに 40年CF表 + サマリ + グラフ が出ることを確認</a:t>
             </a:r>
             <a:endParaRPr lang="en-US" sz="1400" dirty="0"/>
           </a:p>
@@ -3768,7 +3826,7 @@
                 <a:ea typeface="Yu Gothic UI Semibold" pitchFamily="34" charset="-122"/>
                 <a:cs typeface="Yu Gothic UI Semibold" pitchFamily="34" charset="-120"/>
               </a:rPr>
-              <a:t>演習1 ヒアリングのフォーム化 — 観点別チェック</a:t>
+              <a:t>演習1 GAS で 入力→Gemini→スプシ書出 を実装 — 観点別チェック</a:t>
             </a:r>
             <a:endParaRPr lang="en-US" sz="2600" dirty="0"/>
           </a:p>
@@ -3932,7 +3990,7 @@
                 <a:ea typeface="Yu Gothic UI Semibold" pitchFamily="34" charset="-122"/>
                 <a:cs typeface="Yu Gothic UI Semibold" pitchFamily="34" charset="-120"/>
               </a:rPr>
-              <a:t>A. 所要時間</a:t>
+              <a:t>A. セットアップの正確性</a:t>
             </a:r>
             <a:endParaRPr lang="en-US" sz="1500" dirty="0"/>
           </a:p>
@@ -3985,7 +4043,7 @@
                 <a:ea typeface="Yu Gothic UI" pitchFamily="34" charset="-122"/>
                 <a:cs typeface="Yu Gothic UI" pitchFamily="34" charset="-120"/>
               </a:rPr>
-              <a:t>回答に何分かかるか事前に書かれているか</a:t>
+              <a:t>testSetup が全項目 OK で返っているか</a:t>
             </a:r>
             <a:endParaRPr lang="en-US" sz="1300" dirty="0"/>
           </a:p>
@@ -4038,7 +4096,7 @@
                 <a:ea typeface="Yu Gothic UI" pitchFamily="34" charset="-122"/>
                 <a:cs typeface="Yu Gothic UI" pitchFamily="34" charset="-120"/>
               </a:rPr>
-              <a:t>10分以内が目安</a:t>
+              <a:t>「顧客カルテ 項目数: 30前後」「前提テーブル 項目数: 18」が期待値</a:t>
             </a:r>
             <a:endParaRPr lang="en-US" sz="1300" dirty="0"/>
           </a:p>
@@ -4163,7 +4221,7 @@
                 <a:ea typeface="Yu Gothic UI Semibold" pitchFamily="34" charset="-122"/>
                 <a:cs typeface="Yu Gothic UI Semibold" pitchFamily="34" charset="-120"/>
               </a:rPr>
-              <a:t>B. セクション分け</a:t>
+              <a:t>B. プロンプト設計</a:t>
             </a:r>
             <a:endParaRPr lang="en-US" sz="1500" dirty="0"/>
           </a:p>
@@ -4216,7 +4274,7 @@
                 <a:ea typeface="Yu Gothic UI" pitchFamily="34" charset="-122"/>
                 <a:cs typeface="Yu Gothic UI" pitchFamily="34" charset="-120"/>
               </a:rPr>
-              <a:t>1画面に質問を詰めすぎていないか</a:t>
+              <a:t>buildPrompt_ が 顧客カルテ+前提テーブル を JSON で渡し、出力形式を明示しているか</a:t>
             </a:r>
             <a:endParaRPr lang="en-US" sz="1300" dirty="0"/>
           </a:p>
@@ -4269,7 +4327,7 @@
                 <a:ea typeface="Yu Gothic UI" pitchFamily="34" charset="-122"/>
                 <a:cs typeface="Yu Gothic UI" pitchFamily="34" charset="-120"/>
               </a:rPr>
-              <a:t>5-7問でセクション切り</a:t>
+              <a:t>「AI に何を返してほしいか」の指示が具体的か</a:t>
             </a:r>
             <a:endParaRPr lang="en-US" sz="1300" dirty="0"/>
           </a:p>
@@ -4394,7 +4452,7 @@
                 <a:ea typeface="Yu Gothic UI Semibold" pitchFamily="34" charset="-122"/>
                 <a:cs typeface="Yu Gothic UI Semibold" pitchFamily="34" charset="-120"/>
               </a:rPr>
-              <a:t>C. 必須項目の明示</a:t>
+              <a:t>C. 書き出しの読みやすさ</a:t>
             </a:r>
             <a:endParaRPr lang="en-US" sz="1500" dirty="0"/>
           </a:p>
@@ -4447,7 +4505,7 @@
                 <a:ea typeface="Yu Gothic UI" pitchFamily="34" charset="-122"/>
                 <a:cs typeface="Yu Gothic UI" pitchFamily="34" charset="-120"/>
               </a:rPr>
-              <a:t>回答必須か任意かが明確か</a:t>
+              <a:t>シミュレーション結果シートに 色分け(収支マイナス赤/貯蓄200万以下黄)が効いているか</a:t>
             </a:r>
             <a:endParaRPr lang="en-US" sz="1300" dirty="0"/>
           </a:p>
@@ -4500,7 +4558,7 @@
                 <a:ea typeface="Yu Gothic UI" pitchFamily="34" charset="-122"/>
                 <a:cs typeface="Yu Gothic UI" pitchFamily="34" charset="-120"/>
               </a:rPr>
-              <a:t>必須に「*」マークを</a:t>
+              <a:t>グラフが自動生成されているか、顧客に見せられるレイアウトか</a:t>
             </a:r>
             <a:endParaRPr lang="en-US" sz="1300" dirty="0"/>
           </a:p>
@@ -4591,7 +4649,7 @@
                 <a:ea typeface="Yu Gothic UI Semibold" pitchFamily="34" charset="-122"/>
                 <a:cs typeface="Yu Gothic UI Semibold" pitchFamily="34" charset="-120"/>
               </a:rPr>
-              <a:t>演習2 フォーム回答→顧客情報シート整理 GAS</a:t>
+              <a:t>演習2 3ケース実測 + 運用ルール決定</a:t>
             </a:r>
             <a:endParaRPr lang="en-US" sz="2600" dirty="0"/>
           </a:p>
@@ -4719,7 +4777,7 @@
                 <a:ea typeface="Yu Gothic UI" pitchFamily="34" charset="-122"/>
                 <a:cs typeface="Yu Gothic UI" pitchFamily="34" charset="-120"/>
               </a:rPr>
-              <a:t>フォーム回答が来ても顧客情報シートへの転記が手作業。GAS で自動化。</a:t>
+              <a:t>実装したツールを 3ケースで動かして 精度・実用性を検証し、"顧客に使う時のルール" を決める。</a:t>
             </a:r>
             <a:endParaRPr lang="en-US" sz="1400" dirty="0"/>
           </a:p>
@@ -4848,7 +4906,7 @@
                 <a:ea typeface="Yu Gothic UI" pitchFamily="34" charset="-122"/>
                 <a:cs typeface="Yu Gothic UI" pitchFamily="34" charset="-120"/>
               </a:rPr>
-              <a:t>Gemini に「フォーム回答→顧客情報シート整理GAS」依頼</a:t>
+              <a:t>数値精度の限界: Gemini は 前年+収支=当年 の累積を間違えることがある、目視必須</a:t>
             </a:r>
             <a:endParaRPr lang="en-US" sz="1400" dirty="0"/>
           </a:p>
@@ -4869,7 +4927,7 @@
                 <a:ea typeface="Yu Gothic UI" pitchFamily="34" charset="-122"/>
                 <a:cs typeface="Yu Gothic UI" pitchFamily="34" charset="-120"/>
               </a:rPr>
-              <a:t>重複チェックは氏名+メールで</a:t>
+              <a:t>顧客の目の前で 前提を変えて再実行 = "パラメータ次第で変わる" を体感させる強力なデモ</a:t>
             </a:r>
             <a:endParaRPr lang="en-US" sz="1400" dirty="0"/>
           </a:p>
@@ -4890,7 +4948,7 @@
                 <a:ea typeface="Yu Gothic UI" pitchFamily="34" charset="-122"/>
                 <a:cs typeface="Yu Gothic UI" pitchFamily="34" charset="-120"/>
               </a:rPr>
-              <a:t>回答内容に異常(空欄多すぎ)は通知</a:t>
+              <a:t>破綻年は 顧客への説明トーンが重要 — "破綻するので保険買え" ではなく "備えを一緒に考える材料"</a:t>
             </a:r>
             <a:endParaRPr lang="en-US" sz="1400" dirty="0"/>
           </a:p>
@@ -4911,7 +4969,7 @@
                 <a:ea typeface="Yu Gothic UI" pitchFamily="34" charset="-122"/>
                 <a:cs typeface="Yu Gothic UI" pitchFamily="34" charset="-120"/>
               </a:rPr>
-              <a:t>テスト回答で動作確認</a:t>
+              <a:t>運用ルールに "AI出力そのままは顧客に見せない、必ずレビューしてから" を含める</a:t>
             </a:r>
             <a:endParaRPr lang="en-US" sz="1400" dirty="0"/>
           </a:p>
@@ -5040,7 +5098,7 @@
                 <a:ea typeface="Yu Gothic UI" pitchFamily="34" charset="-122"/>
                 <a:cs typeface="Yu Gothic UI" pitchFamily="34" charset="-120"/>
               </a:rPr>
-              <a:t>onFormSubmit でGAS自動実行</a:t>
+              <a:t>ケース1: 記入例をコピペ → 実行 → 40年CFが妥当か目視確認</a:t>
             </a:r>
             <a:endParaRPr lang="en-US" sz="1400" dirty="0"/>
           </a:p>
@@ -5061,7 +5119,7 @@
                 <a:ea typeface="Yu Gothic UI" pitchFamily="34" charset="-122"/>
                 <a:cs typeface="Yu Gothic UI" pitchFamily="34" charset="-120"/>
               </a:rPr>
-              <a:t>既存顧客は更新、新規は追加</a:t>
+              <a:t>ケース2: 前提テーブルの投資リターンを 2.0% → 4.0% に変更 → 再実行 → 貯蓄推移の変化を確認</a:t>
             </a:r>
             <a:endParaRPr lang="en-US" sz="1400" dirty="0"/>
           </a:p>
@@ -5082,7 +5140,7 @@
                 <a:ea typeface="Yu Gothic UI" pitchFamily="34" charset="-122"/>
                 <a:cs typeface="Yu Gothic UI" pitchFamily="34" charset="-120"/>
               </a:rPr>
-              <a:t>日時+回答内容をスプシに整形</a:t>
+              <a:t>ケース3: 年収を600 → 200万に変更 → 破綻年が出ることを確認、総評で対策提示があるか</a:t>
             </a:r>
             <a:endParaRPr lang="en-US" sz="1400" dirty="0"/>
           </a:p>
@@ -5103,7 +5161,28 @@
                 <a:ea typeface="Yu Gothic UI" pitchFamily="34" charset="-122"/>
                 <a:cs typeface="Yu Gothic UI" pitchFamily="34" charset="-120"/>
               </a:rPr>
-              <a:t>通知メールで「ヒアリング完了」を自分に通知</a:t>
+              <a:t>保険提案フックが第15回マスタ表の商品と接続できるか 1件試す</a:t>
+            </a:r>
+            <a:endParaRPr lang="en-US" sz="1400" dirty="0"/>
+          </a:p>
+          <a:p>
+            <a:pPr marL="342900" indent="-342900">
+              <a:spcAft>
+                <a:spcPts val="400"/>
+              </a:spcAft>
+              <a:buSzPct val="100000"/>
+              <a:buChar char="●"/>
+            </a:pPr>
+            <a:r>
+              <a:rPr lang="en-US" sz="1400" dirty="0">
+                <a:solidFill>
+                  <a:srgbClr val="1A1A1A"/>
+                </a:solidFill>
+                <a:latin typeface="Yu Gothic UI" pitchFamily="34" charset="0"/>
+                <a:ea typeface="Yu Gothic UI" pitchFamily="34" charset="-122"/>
+                <a:cs typeface="Yu Gothic UI" pitchFamily="34" charset="-120"/>
+              </a:rPr>
+              <a:t>運用ルール: 面談中に使う手順、顧客への説明トーン、AI出力の "見せない/見せる" 線引きを決める</a:t>
             </a:r>
             <a:endParaRPr lang="en-US" sz="1400" dirty="0"/>
           </a:p>
@@ -5194,7 +5273,7 @@
                 <a:ea typeface="Yu Gothic UI Semibold" pitchFamily="34" charset="-122"/>
                 <a:cs typeface="Yu Gothic UI Semibold" pitchFamily="34" charset="-120"/>
               </a:rPr>
-              <a:t>演習2 フォーム回答→顧客情報シート整理 GAS — 観点別チェック</a:t>
+              <a:t>演習2 3ケース実測 + 運用ルール決定 — 観点別チェック</a:t>
             </a:r>
             <a:endParaRPr lang="en-US" sz="2600" dirty="0"/>
           </a:p>
@@ -5358,7 +5437,7 @@
                 <a:ea typeface="Yu Gothic UI Semibold" pitchFamily="34" charset="-122"/>
                 <a:cs typeface="Yu Gothic UI Semibold" pitchFamily="34" charset="-120"/>
               </a:rPr>
-              <a:t>A. 重複処理</a:t>
+              <a:t>A. 数値の妥当性</a:t>
             </a:r>
             <a:endParaRPr lang="en-US" sz="1500" dirty="0"/>
           </a:p>
@@ -5411,7 +5490,7 @@
                 <a:ea typeface="Yu Gothic UI" pitchFamily="34" charset="-122"/>
                 <a:cs typeface="Yu Gothic UI" pitchFamily="34" charset="-120"/>
               </a:rPr>
-              <a:t>既存顧客の二重登録を防げているか</a:t>
+              <a:t>生成された CF表を 目視チェックしたか</a:t>
             </a:r>
             <a:endParaRPr lang="en-US" sz="1300" dirty="0"/>
           </a:p>
@@ -5464,7 +5543,7 @@
                 <a:ea typeface="Yu Gothic UI" pitchFamily="34" charset="-122"/>
                 <a:cs typeface="Yu Gothic UI" pitchFamily="34" charset="-120"/>
               </a:rPr>
-              <a:t>氏名+メールでチェック</a:t>
+              <a:t>前年貯蓄+当年収支=当年貯蓄 が合っているか、明らかな飛び値がないか</a:t>
             </a:r>
             <a:endParaRPr lang="en-US" sz="1300" dirty="0"/>
           </a:p>
@@ -5589,7 +5668,7 @@
                 <a:ea typeface="Yu Gothic UI Semibold" pitchFamily="34" charset="-122"/>
                 <a:cs typeface="Yu Gothic UI Semibold" pitchFamily="34" charset="-120"/>
               </a:rPr>
-              <a:t>B. 異常検知</a:t>
+              <a:t>B. 前提の影響</a:t>
             </a:r>
             <a:endParaRPr lang="en-US" sz="1500" dirty="0"/>
           </a:p>
@@ -5642,7 +5721,7 @@
                 <a:ea typeface="Yu Gothic UI" pitchFamily="34" charset="-122"/>
                 <a:cs typeface="Yu Gothic UI" pitchFamily="34" charset="-120"/>
               </a:rPr>
-              <a:t>空欄多すぎ等の異常を検知できるか</a:t>
+              <a:t>投資リターン変更で結果がどう変わったか、顧客に説明できるか</a:t>
             </a:r>
             <a:endParaRPr lang="en-US" sz="1300" dirty="0"/>
           </a:p>
@@ -5695,7 +5774,7 @@
                 <a:ea typeface="Yu Gothic UI" pitchFamily="34" charset="-122"/>
                 <a:cs typeface="Yu Gothic UI" pitchFamily="34" charset="-120"/>
               </a:rPr>
-              <a:t>記入率20%未満で通知</a:t>
+              <a:t>「前提次第で変わる」を顧客に伝える言い回しが決まっているか</a:t>
             </a:r>
             <a:endParaRPr lang="en-US" sz="1300" dirty="0"/>
           </a:p>
@@ -5820,7 +5899,7 @@
                 <a:ea typeface="Yu Gothic UI Semibold" pitchFamily="34" charset="-122"/>
                 <a:cs typeface="Yu Gothic UI Semibold" pitchFamily="34" charset="-120"/>
               </a:rPr>
-              <a:t>C. データ整形</a:t>
+              <a:t>C. 運用ルールの実効性</a:t>
             </a:r>
             <a:endParaRPr lang="en-US" sz="1500" dirty="0"/>
           </a:p>
@@ -5873,7 +5952,7 @@
                 <a:ea typeface="Yu Gothic UI" pitchFamily="34" charset="-122"/>
                 <a:cs typeface="Yu Gothic UI" pitchFamily="34" charset="-120"/>
               </a:rPr>
-              <a:t>顧客情報シートの形式に合うよう変換されているか</a:t>
+              <a:t>面談中の使い方、AI出力のレビュー手順、顧客への見せ方が具体化しているか</a:t>
             </a:r>
             <a:endParaRPr lang="en-US" sz="1300" dirty="0"/>
           </a:p>
@@ -5926,7 +6005,7 @@
                 <a:ea typeface="Yu Gothic UI" pitchFamily="34" charset="-122"/>
                 <a:cs typeface="Yu Gothic UI" pitchFamily="34" charset="-120"/>
               </a:rPr>
-              <a:t>列のマッピングを最初に決める</a:t>
+              <a:t>「AI出力そのままは顧客に見せない」が徹底できるルールになっているか</a:t>
             </a:r>
             <a:endParaRPr lang="en-US" sz="1300" dirty="0"/>
           </a:p>
@@ -6122,7 +6201,7 @@
                 <a:ea typeface="Yu Gothic UI Semibold" pitchFamily="34" charset="-122"/>
                 <a:cs typeface="Yu Gothic UI Semibold" pitchFamily="34" charset="-120"/>
               </a:rPr>
-              <a:t>商談前準備が自動化</a:t>
+              <a:t>ライフプランAI が完成</a:t>
             </a:r>
             <a:endParaRPr lang="en-US" sz="1800" dirty="0"/>
           </a:p>
@@ -6161,7 +6240,7 @@
                 <a:ea typeface="Yu Gothic UI" pitchFamily="34" charset="-122"/>
                 <a:cs typeface="Yu Gothic UI" pitchFamily="34" charset="-120"/>
               </a:rPr>
-              <a:t>30項目のヒアリングがフォームで事前完了、商談は提案に集中。</a:t>
+              <a:t>顧客カルテを埋めるだけで 30秒で 40年CF + 保険提案フックが出る。</a:t>
             </a:r>
             <a:endParaRPr lang="en-US" sz="1300" dirty="0"/>
           </a:p>
@@ -6266,7 +6345,7 @@
                 <a:ea typeface="Yu Gothic UI Semibold" pitchFamily="34" charset="-122"/>
                 <a:cs typeface="Yu Gothic UI Semibold" pitchFamily="34" charset="-120"/>
               </a:rPr>
-              <a:t>データが自動で整理</a:t>
+              <a:t>AI の限界を体感</a:t>
             </a:r>
             <a:endParaRPr lang="en-US" sz="1800" dirty="0"/>
           </a:p>
@@ -6305,7 +6384,7 @@
                 <a:ea typeface="Yu Gothic UI" pitchFamily="34" charset="-122"/>
                 <a:cs typeface="Yu Gothic UI" pitchFamily="34" charset="-120"/>
               </a:rPr>
-              <a:t>GAS で顧客情報シートに自動転記、転記ミスゼロ。</a:t>
+              <a:t>数値精度・出力の暴走リスクを 3ケース実測で把握、"見せる前にレビュー" の運用ルールに。</a:t>
             </a:r>
             <a:endParaRPr lang="en-US" sz="1300" dirty="0"/>
           </a:p>
@@ -6410,7 +6489,7 @@
                 <a:ea typeface="Yu Gothic UI Semibold" pitchFamily="34" charset="-122"/>
                 <a:cs typeface="Yu Gothic UI Semibold" pitchFamily="34" charset="-120"/>
               </a:rPr>
-              <a:t>次回はシミュレーション</a:t>
+              <a:t>第15回・第18回と接続</a:t>
             </a:r>
             <a:endParaRPr lang="en-US" sz="1800" dirty="0"/>
           </a:p>
@@ -6449,7 +6528,7 @@
                 <a:ea typeface="Yu Gothic UI" pitchFamily="34" charset="-122"/>
                 <a:cs typeface="Yu Gothic UI" pitchFamily="34" charset="-120"/>
               </a:rPr>
-              <a:t>このデータを使って将来推移を計算する。</a:t>
+              <a:t>提案フック→引受判定マスタ表(第15回)、CF表→顧客向けPDFレポート(第18回) の連鎖が視野に。</a:t>
             </a:r>
             <a:endParaRPr lang="en-US" sz="1300" dirty="0"/>
           </a:p>
